--- a/KickOff/Aegis Kickoff.pptx
+++ b/KickOff/Aegis Kickoff.pptx
@@ -4,6 +4,9 @@
   <p:sldMasterIdLst>
     <p:sldMasterId id="2147483648" r:id="rId1"/>
   </p:sldMasterIdLst>
+  <p:notesMasterIdLst>
+    <p:notesMasterId r:id="rId10"/>
+  </p:notesMasterIdLst>
   <p:sldIdLst>
     <p:sldId id="256" r:id="rId2"/>
     <p:sldId id="257" r:id="rId3"/>
@@ -14,9 +17,6 @@
     <p:sldId id="262" r:id="rId8"/>
     <p:sldId id="263" r:id="rId9"/>
   </p:sldIdLst>
-  <p:notesMasterIdLst>
-    <p:notesMasterId r:id="rId10"/>
-  </p:notesMasterIdLst>
   <p:sldSz cx="12192000" cy="6858000"/>
   <p:notesSz cx="6858000" cy="12192000"/>
   <p:defaultTextStyle>
@@ -111,6 +111,11 @@
       </a:defRPr>
     </a:lvl9pPr>
   </p:defaultTextStyle>
+  <p:extLst>
+    <p:ext uri="{EFAFB233-063F-42B5-8137-9DF3F51BA10A}">
+      <p15:sldGuideLst xmlns:p15="http://schemas.microsoft.com/office/powerpoint/2012/main"/>
+    </p:ext>
+  </p:extLst>
 </p:presentation>
 </file>
 
@@ -136,234 +141,10 @@
           <a:chExt cx="0" cy="0"/>
         </a:xfrm>
       </p:grpSpPr>
-      <p:sp>
-        <p:nvSpPr>
-          <p:cNvPr id="2" name="Header Placeholder 1"/>
-          <p:cNvSpPr>
-            <a:spLocks noGrp="1"/>
-          </p:cNvSpPr>
-          <p:nvPr>
-            <p:ph type="hdr" sz="quarter"/>
-          </p:nvPr>
-        </p:nvSpPr>
-        <p:spPr>
-          <a:xfrm>
-            <a:off x="0" y="0"/>
-            <a:ext cx="2971800" cy="458788"/>
-          </a:xfrm>
-          <a:prstGeom prst="rect">
-            <a:avLst/>
-          </a:prstGeom>
-        </p:spPr>
-        <p:txBody>
-          <a:bodyPr vert="horz" lIns="91440" tIns="45720" rIns="91440" bIns="45720" rtlCol="0"/>
-          <a:lstStyle>
-            <a:lvl1pPr algn="l">
-              <a:defRPr sz="1200"/>
-            </a:lvl1pPr>
-          </a:lstStyle>
-          <a:p>
-            <a:endParaRPr lang="en-US"/>
-          </a:p>
-        </p:txBody>
-      </p:sp>
-      <p:sp>
-        <p:nvSpPr>
-          <p:cNvPr id="3" name="Date Placeholder 2"/>
-          <p:cNvSpPr>
-            <a:spLocks noGrp="1"/>
-          </p:cNvSpPr>
-          <p:nvPr>
-            <p:ph type="dt" idx="1"/>
-          </p:nvPr>
-        </p:nvSpPr>
-        <p:spPr>
-          <a:xfrm>
-            <a:off x="3884613" y="0"/>
-            <a:ext cx="2971800" cy="458788"/>
-          </a:xfrm>
-          <a:prstGeom prst="rect">
-            <a:avLst/>
-          </a:prstGeom>
-        </p:spPr>
-        <p:txBody>
-          <a:bodyPr vert="horz" lIns="91440" tIns="45720" rIns="91440" bIns="45720" rtlCol="0"/>
-          <a:lstStyle>
-            <a:lvl1pPr algn="r">
-              <a:defRPr sz="1200"/>
-            </a:lvl1pPr>
-          </a:lstStyle>
-          <a:p>
-            <a:fld id="{5282F153-3F37-0F45-9E97-73ACFA13230C}" type="datetimeFigureOut">
-              <a:rPr lang="en-US"/>
-              <a:t>7/23/19</a:t>
-            </a:fld>
-            <a:endParaRPr lang="en-US"/>
-          </a:p>
-        </p:txBody>
-      </p:sp>
-      <p:sp>
-        <p:nvSpPr>
-          <p:cNvPr id="4" name="Slide Image Placeholder 3"/>
-          <p:cNvSpPr>
-            <a:spLocks noGrp="1" noRot="1" noChangeAspect="1"/>
-          </p:cNvSpPr>
-          <p:nvPr>
-            <p:ph type="sldImg" idx="2"/>
-          </p:nvPr>
-        </p:nvSpPr>
-        <p:spPr>
-          <a:xfrm>
-            <a:off x="685800" y="1143000"/>
-            <a:ext cx="5486400" cy="3086100"/>
-          </a:xfrm>
-          <a:prstGeom prst="rect">
-            <a:avLst/>
-          </a:prstGeom>
-          <a:noFill/>
-          <a:ln w="12700">
-            <a:solidFill>
-              <a:prstClr val="black"/>
-            </a:solidFill>
-          </a:ln>
-        </p:spPr>
-        <p:txBody>
-          <a:bodyPr vert="horz" lIns="91440" tIns="45720" rIns="91440" bIns="45720" rtlCol="0" anchor="ctr"/>
-          <a:lstStyle/>
-          <a:p>
-            <a:endParaRPr lang="en-US"/>
-          </a:p>
-        </p:txBody>
-      </p:sp>
-      <p:sp>
-        <p:nvSpPr>
-          <p:cNvPr id="5" name="Notes Placeholder 4"/>
-          <p:cNvSpPr>
-            <a:spLocks noGrp="1"/>
-          </p:cNvSpPr>
-          <p:nvPr>
-            <p:ph type="body" sz="quarter" idx="3"/>
-          </p:nvPr>
-        </p:nvSpPr>
-        <p:spPr>
-          <a:xfrm>
-            <a:off x="685800" y="4400550"/>
-            <a:ext cx="5486400" cy="3600450"/>
-          </a:xfrm>
-          <a:prstGeom prst="rect">
-            <a:avLst/>
-          </a:prstGeom>
-        </p:spPr>
-        <p:txBody>
-          <a:bodyPr vert="horz" lIns="91440" tIns="45720" rIns="91440" bIns="45720" rtlCol="0"/>
-          <a:lstStyle/>
-          <a:p>
-            <a:pPr lvl="0"/>
-            <a:r>
-              <a:rPr lang="en-US"/>
-              <a:t>Click to edit Master text styles</a:t>
-            </a:r>
-          </a:p>
-          <a:p>
-            <a:pPr lvl="1"/>
-            <a:r>
-              <a:rPr lang="en-US"/>
-              <a:t>Second level</a:t>
-            </a:r>
-          </a:p>
-          <a:p>
-            <a:pPr lvl="2"/>
-            <a:r>
-              <a:rPr lang="en-US"/>
-              <a:t>Third level</a:t>
-            </a:r>
-          </a:p>
-          <a:p>
-            <a:pPr lvl="3"/>
-            <a:r>
-              <a:rPr lang="en-US"/>
-              <a:t>Fourth level</a:t>
-            </a:r>
-          </a:p>
-          <a:p>
-            <a:pPr lvl="4"/>
-            <a:r>
-              <a:rPr lang="en-US"/>
-              <a:t>Fifth level</a:t>
-            </a:r>
-          </a:p>
-        </p:txBody>
-      </p:sp>
-      <p:sp>
-        <p:nvSpPr>
-          <p:cNvPr id="6" name="Footer Placeholder 5"/>
-          <p:cNvSpPr>
-            <a:spLocks noGrp="1"/>
-          </p:cNvSpPr>
-          <p:nvPr>
-            <p:ph type="ftr" sz="quarter" idx="4"/>
-          </p:nvPr>
-        </p:nvSpPr>
-        <p:spPr>
-          <a:xfrm>
-            <a:off x="0" y="8685213"/>
-            <a:ext cx="2971800" cy="458787"/>
-          </a:xfrm>
-          <a:prstGeom prst="rect">
-            <a:avLst/>
-          </a:prstGeom>
-        </p:spPr>
-        <p:txBody>
-          <a:bodyPr vert="horz" lIns="91440" tIns="45720" rIns="91440" bIns="45720" rtlCol="0" anchor="b"/>
-          <a:lstStyle>
-            <a:lvl1pPr algn="l">
-              <a:defRPr sz="1200"/>
-            </a:lvl1pPr>
-          </a:lstStyle>
-          <a:p>
-            <a:endParaRPr lang="en-US"/>
-          </a:p>
-        </p:txBody>
-      </p:sp>
-      <p:sp>
-        <p:nvSpPr>
-          <p:cNvPr id="7" name="Slide Number Placeholder 6"/>
-          <p:cNvSpPr>
-            <a:spLocks noGrp="1"/>
-          </p:cNvSpPr>
-          <p:nvPr>
-            <p:ph type="sldNum" sz="quarter" idx="5"/>
-          </p:nvPr>
-        </p:nvSpPr>
-        <p:spPr>
-          <a:xfrm>
-            <a:off x="3884613" y="8685213"/>
-            <a:ext cx="2971800" cy="458787"/>
-          </a:xfrm>
-          <a:prstGeom prst="rect">
-            <a:avLst/>
-          </a:prstGeom>
-        </p:spPr>
-        <p:txBody>
-          <a:bodyPr vert="horz" lIns="91440" tIns="45720" rIns="91440" bIns="45720" rtlCol="0" anchor="b"/>
-          <a:lstStyle>
-            <a:lvl1pPr algn="r">
-              <a:defRPr sz="1200"/>
-            </a:lvl1pPr>
-          </a:lstStyle>
-          <a:p>
-            <a:fld id="{CE5E9CC1-C706-0F49-92D6-E571CC5EEA8F}" type="slidenum">
-              <a:rPr lang="en-US"/>
-              <a:t>‹#›</a:t>
-            </a:fld>
-            <a:endParaRPr lang="en-US"/>
-          </a:p>
-        </p:txBody>
-      </p:sp>
     </p:spTree>
     <p:extLst>
       <p:ext uri="{BB962C8B-B14F-4D97-AF65-F5344CB8AC3E}">
-        <p14:creationId xmlns:p14="http://schemas.microsoft.com/office/powerpoint/2010/main" val="1024086991"/>
+        <p14:creationId xmlns:p14="http://schemas.microsoft.com/office/powerpoint/2010/main" val="209504717"/>
       </p:ext>
     </p:extLst>
   </p:cSld>
@@ -511,7 +292,6 @@
               <a:rPr lang="en-US" dirty="0"/>
               <a:t>Kurz vorstellen: Wir drei, Betreuer Prof. Dr. Spandl. Aegis ist eine Anwendung zur Dateiverschlüsselung, bei der die Bedienung im Mittelpunkt steht. Der Kryptokern soll später auch für Ende-zu-Ende-verschlüsselte Kommunikation wiederverwendbar sein.</a:t>
             </a:r>
-            <a:endParaRPr lang="en-US" dirty="0"/>
           </a:p>
         </p:txBody>
       </p:sp>
@@ -599,7 +379,6 @@
               <a:rPr lang="en-US" dirty="0"/>
               <a:t>Die Kryptografie ist gelöst, die Bedienung nicht. Genau hier setzt Aegis an: Sicherheit, die auch Laien korrekt nutzen können. Dazu kommt die Post-Quanten-Frage: Daten, die heute verschlüsselt verschickt werden, sollen auch in Zukunft geschützt bleiben.</a:t>
             </a:r>
-            <a:endParaRPr lang="en-US" dirty="0"/>
           </a:p>
         </p:txBody>
       </p:sp>
@@ -687,7 +466,6 @@
               <a:rPr lang="en-US" dirty="0"/>
               <a:t>Wir haben die wichtigsten Werkzeuge systematisch mit einer Nutzwertanalyse verglichen und selbst getestet: Kleopatra, age und Picocrypt-NG. Cryptomator haben wir ergänzend betrachtet, weil es ein anderes Konzept verfolgt, aber für eine spätere Tresor-Funktion interessant ist. Die beobachteten Stärken und Schwächen fließen direkt in die Anforderungen von Aegis ein.</a:t>
             </a:r>
-            <a:endParaRPr lang="en-US" dirty="0"/>
           </a:p>
         </p:txBody>
       </p:sp>
@@ -775,7 +553,6 @@
               <a:rPr lang="en-US" dirty="0"/>
               <a:t>Machbar ist das Projekt, weil wir auf erprobte Bausteine setzen: Rust für Speichersicherheit, etablierte Kryptobibliotheken statt Eigenbau, Tauri für die Oberfläche. Kern ist eine eigenständige Kryptobibliothek. Darauf setzen Oberfläche, Kommandozeile und die Schnittstelle für Ende-zu-Ende-Kommunikation auf. Schwerpunkt ist unser eigenes Format mit hybrider Post-Quanten-Kryptografie, age dient als sicherer Fallback.</a:t>
             </a:r>
-            <a:endParaRPr lang="en-US" dirty="0"/>
           </a:p>
         </p:txBody>
       </p:sp>
@@ -863,7 +640,6 @@
               <a:rPr lang="en-US" dirty="0"/>
               <a:t>Weil Benutzerfreundlichkeit unser Schwerpunkt ist, bauen wir zuerst einen Klickdummy ohne Funktion. Den geben wir Testpersonen ohne Vorwissen und beobachten, wo sie hängen bleiben. Erst danach entsteht die echte Oberfläche. Da wir Tauri verwenden, können wir große Teile des Klickdummys weiterverwenden.</a:t>
             </a:r>
-            <a:endParaRPr lang="en-US" dirty="0"/>
           </a:p>
         </p:txBody>
       </p:sp>
@@ -951,7 +727,6 @@
               <a:rPr lang="en-US" dirty="0"/>
               <a:t>Am Ende steht eine Desktop-Anwendung, die Laien ohne Vorwissen bedienen können, mit unserem eigenen Format und hybrider Post-Quanten-Kryptografie als Schwerpunkt. Wer lieber auf ein erprobtes Format setzt, kann in den Einstellungen age als Fallback wählen. Dazu kommen eine Kommandozeile und die Schnittstelle für verschlüsselte Kommunikation.</a:t>
             </a:r>
-            <a:endParaRPr lang="en-US" dirty="0"/>
           </a:p>
         </p:txBody>
       </p:sp>
@@ -1039,7 +814,6 @@
               <a:rPr lang="en-US" dirty="0"/>
               <a:t>Wir bewerten Aegis mit denselben Maßstäben wie die Konkurrenz. Bei der Usability durch Beobachtung und den standardisierten SUS-Fragebogen, bei der Sicherheit durch Tests, Testvektoren, Fuzzing und den Abgleich mit der BSI-Richtlinie, bei der Performance durch Benchmarks und RAM-Messungen.</a:t>
             </a:r>
-            <a:endParaRPr lang="en-US" dirty="0"/>
           </a:p>
         </p:txBody>
       </p:sp>
@@ -1127,7 +901,6 @@
               <a:rPr lang="en-US" dirty="0"/>
               <a:t>Danke und offene Runde für Fragen.</a:t>
             </a:r>
-            <a:endParaRPr lang="en-US" dirty="0"/>
           </a:p>
         </p:txBody>
       </p:sp>
@@ -1205,6 +978,7 @@
         <a:solidFill>
           <a:srgbClr val="F5F4EF"/>
         </a:solidFill>
+        <a:effectLst/>
       </p:bgPr>
     </p:bg>
     <p:spTree>
@@ -1224,7 +998,9 @@
       <p:sp>
         <p:nvSpPr>
           <p:cNvPr id="2" name="Title Placeholder 1"/>
-          <p:cNvSpPr/>
+          <p:cNvSpPr>
+            <a:spLocks noGrp="1"/>
+          </p:cNvSpPr>
           <p:nvPr>
             <p:ph type="title"/>
           </p:nvPr>
@@ -1243,7 +1019,7 @@
         <p:txBody>
           <a:bodyPr wrap="square" lIns="0" tIns="0" rIns="0" bIns="0" rtlCol="0" anchor="t"/>
           <a:lstStyle>
-            <a:lvl1pPr algn="l" indent="0" marL="0">
+            <a:lvl1pPr marL="0" indent="0" algn="l">
               <a:lnSpc>
                 <a:spcPct val="115000"/>
               </a:lnSpc>
@@ -1259,7 +1035,7 @@
             </a:lvl1pPr>
           </a:lstStyle>
           <a:p>
-            <a:pPr algn="l" indent="0" marL="0">
+            <a:pPr marL="0" indent="0" algn="l">
               <a:lnSpc>
                 <a:spcPct val="115000"/>
               </a:lnSpc>
@@ -1272,9 +1048,11 @@
       <p:sp>
         <p:nvSpPr>
           <p:cNvPr id="3" name="Text Placeholder 2"/>
-          <p:cNvSpPr/>
+          <p:cNvSpPr>
+            <a:spLocks noGrp="1"/>
+          </p:cNvSpPr>
           <p:nvPr>
-            <p:ph idx="101" type="body"/>
+            <p:ph type="body" idx="101"/>
           </p:nvPr>
         </p:nvSpPr>
         <p:spPr>
@@ -1291,7 +1069,7 @@
         <p:txBody>
           <a:bodyPr wrap="square" lIns="0" tIns="0" rIns="0" bIns="0" rtlCol="0" anchor="t"/>
           <a:lstStyle>
-            <a:lvl1pPr algn="l" indent="0" marL="0">
+            <a:lvl1pPr marL="0" indent="0" algn="l">
               <a:lnSpc>
                 <a:spcPct val="140000"/>
               </a:lnSpc>
@@ -1307,7 +1085,7 @@
             </a:lvl1pPr>
           </a:lstStyle>
           <a:p>
-            <a:pPr algn="l" indent="0" marL="0">
+            <a:pPr marL="0" indent="0" algn="l">
               <a:lnSpc>
                 <a:spcPct val="140000"/>
               </a:lnSpc>
@@ -1333,6 +1111,7 @@
         <a:solidFill>
           <a:srgbClr val="F5F4EF"/>
         </a:solidFill>
+        <a:effectLst/>
       </p:bgPr>
     </p:bg>
     <p:spTree>
@@ -1352,7 +1131,9 @@
       <p:sp>
         <p:nvSpPr>
           <p:cNvPr id="2" name="Title Placeholder 1"/>
-          <p:cNvSpPr/>
+          <p:cNvSpPr>
+            <a:spLocks noGrp="1"/>
+          </p:cNvSpPr>
           <p:nvPr>
             <p:ph type="title"/>
           </p:nvPr>
@@ -1371,7 +1152,7 @@
         <p:txBody>
           <a:bodyPr wrap="square" lIns="0" tIns="0" rIns="0" bIns="0" rtlCol="0" anchor="t"/>
           <a:lstStyle>
-            <a:lvl1pPr algn="l" indent="0" marL="0">
+            <a:lvl1pPr marL="0" indent="0" algn="l">
               <a:lnSpc>
                 <a:spcPct val="115000"/>
               </a:lnSpc>
@@ -1387,7 +1168,7 @@
             </a:lvl1pPr>
           </a:lstStyle>
           <a:p>
-            <a:pPr algn="l" indent="0" marL="0">
+            <a:pPr marL="0" indent="0" algn="l">
               <a:lnSpc>
                 <a:spcPct val="115000"/>
               </a:lnSpc>
@@ -1400,9 +1181,11 @@
       <p:sp>
         <p:nvSpPr>
           <p:cNvPr id="3" name="Text Placeholder 2"/>
-          <p:cNvSpPr/>
+          <p:cNvSpPr>
+            <a:spLocks noGrp="1"/>
+          </p:cNvSpPr>
           <p:nvPr>
-            <p:ph idx="101" type="body"/>
+            <p:ph type="body" idx="101"/>
           </p:nvPr>
         </p:nvSpPr>
         <p:spPr>
@@ -1419,7 +1202,7 @@
         <p:txBody>
           <a:bodyPr wrap="square" lIns="0" tIns="0" rIns="0" bIns="0" rtlCol="0" anchor="t"/>
           <a:lstStyle>
-            <a:lvl1pPr algn="l" indent="0" marL="0">
+            <a:lvl1pPr marL="0" indent="0" algn="l">
               <a:lnSpc>
                 <a:spcPct val="140000"/>
               </a:lnSpc>
@@ -1435,7 +1218,7 @@
             </a:lvl1pPr>
           </a:lstStyle>
           <a:p>
-            <a:pPr algn="l" indent="0" marL="0">
+            <a:pPr marL="0" indent="0" algn="l">
               <a:lnSpc>
                 <a:spcPct val="140000"/>
               </a:lnSpc>
@@ -1714,6 +1497,7 @@
         <a:solidFill>
           <a:srgbClr val="12202B"/>
         </a:solidFill>
+        <a:effectLst/>
       </p:bgPr>
     </p:bg>
     <p:spTree>
@@ -1753,14 +1537,14 @@
           </a:bodyPr>
           <a:lstStyle/>
           <a:p>
-            <a:pPr algn="l" indent="0" marL="0">
+            <a:pPr marL="0" indent="0" algn="l">
               <a:lnSpc>
                 <a:spcPts val="1680"/>
               </a:lnSpc>
               <a:buNone/>
             </a:pPr>
             <a:r>
-              <a:rPr lang="en-US" sz="1200" b="1" spc="200" kern="0" dirty="0">
+              <a:rPr lang="en-US" sz="1200" b="1" kern="0" spc="200" dirty="0">
                 <a:solidFill>
                   <a:srgbClr val="7FD6C8"/>
                 </a:solidFill>
@@ -1777,7 +1561,9 @@
       <p:sp>
         <p:nvSpPr>
           <p:cNvPr id="3" name="Text 1"/>
-          <p:cNvSpPr/>
+          <p:cNvSpPr>
+            <a:spLocks noGrp="1"/>
+          </p:cNvSpPr>
           <p:nvPr>
             <p:ph type="title"/>
           </p:nvPr>
@@ -1799,7 +1585,7 @@
           </a:bodyPr>
           <a:lstStyle/>
           <a:p>
-            <a:pPr algn="l" indent="0" marL="0">
+            <a:pPr marL="0" indent="0" algn="l">
               <a:lnSpc>
                 <a:spcPts val="8000"/>
               </a:lnSpc>
@@ -1843,7 +1629,7 @@
           </a:bodyPr>
           <a:lstStyle/>
           <a:p>
-            <a:pPr algn="l" indent="0" marL="0">
+            <a:pPr marL="0" indent="0" algn="l">
               <a:lnSpc>
                 <a:spcPts val="2700"/>
               </a:lnSpc>
@@ -1887,7 +1673,7 @@
           </a:bodyPr>
           <a:lstStyle/>
           <a:p>
-            <a:pPr algn="l" indent="0" marL="0">
+            <a:pPr marL="0" indent="0" algn="l">
               <a:lnSpc>
                 <a:spcPts val="1960"/>
               </a:lnSpc>
@@ -1931,7 +1717,7 @@
           </a:bodyPr>
           <a:lstStyle/>
           <a:p>
-            <a:pPr algn="l" indent="0" marL="0">
+            <a:pPr marL="0" indent="0" algn="l">
               <a:lnSpc>
                 <a:spcPts val="1680"/>
               </a:lnSpc>
@@ -1954,15 +1740,15 @@
       </p:sp>
       <p:pic>
         <p:nvPicPr>
-          <p:cNvPr id="7" name="Image 0" descr="Lock">    </p:cNvPr>
+          <p:cNvPr id="7" name="Image 0" descr="Lock"/>
           <p:cNvPicPr>
             <a:picLocks noChangeAspect="1"/>
           </p:cNvPicPr>
           <p:nvPr/>
         </p:nvPicPr>
         <p:blipFill>
-          <a:blip r:embed="rId1"/>
-          <a:srcRect l="0" r="0" t="0" b="0"/>
+          <a:blip r:embed="rId3"/>
+          <a:srcRect/>
           <a:stretch/>
         </p:blipFill>
         <p:spPr>
@@ -1991,6 +1777,7 @@
         <a:solidFill>
           <a:srgbClr val="F5F4EF"/>
         </a:solidFill>
+        <a:effectLst/>
       </p:bgPr>
     </p:bg>
     <p:spTree>
@@ -2030,14 +1817,14 @@
           </a:bodyPr>
           <a:lstStyle/>
           <a:p>
-            <a:pPr algn="l" indent="0" marL="0">
+            <a:pPr marL="0" indent="0" algn="l">
               <a:lnSpc>
                 <a:spcPts val="1680"/>
               </a:lnSpc>
               <a:buNone/>
             </a:pPr>
             <a:r>
-              <a:rPr lang="en-US" sz="1200" b="1" spc="200" kern="0" dirty="0">
+              <a:rPr lang="en-US" sz="1200" b="1" kern="0" spc="200" dirty="0">
                 <a:solidFill>
                   <a:srgbClr val="1D7368"/>
                 </a:solidFill>
@@ -2054,7 +1841,9 @@
       <p:sp>
         <p:nvSpPr>
           <p:cNvPr id="3" name="Text 1"/>
-          <p:cNvSpPr/>
+          <p:cNvSpPr>
+            <a:spLocks noGrp="1"/>
+          </p:cNvSpPr>
           <p:nvPr>
             <p:ph type="title"/>
           </p:nvPr>
@@ -2076,7 +1865,7 @@
           </a:bodyPr>
           <a:lstStyle/>
           <a:p>
-            <a:pPr algn="l" indent="0" marL="0">
+            <a:pPr marL="0" indent="0" algn="l">
               <a:lnSpc>
                 <a:spcPts val="3960"/>
               </a:lnSpc>
@@ -2123,6 +1912,13 @@
             <a:prstDash val="solid"/>
           </a:ln>
         </p:spPr>
+        <p:txBody>
+          <a:bodyPr/>
+          <a:lstStyle/>
+          <a:p>
+            <a:endParaRPr lang="en-DE"/>
+          </a:p>
+        </p:txBody>
       </p:sp>
       <p:sp>
         <p:nvSpPr>
@@ -2147,7 +1943,7 @@
           </a:bodyPr>
           <a:lstStyle/>
           <a:p>
-            <a:pPr algn="l" indent="0" marL="0">
+            <a:pPr marL="0" indent="0" algn="l">
               <a:lnSpc>
                 <a:spcPts val="2160"/>
               </a:lnSpc>
@@ -2191,7 +1987,7 @@
           </a:bodyPr>
           <a:lstStyle/>
           <a:p>
-            <a:pPr algn="l" indent="0" marL="0">
+            <a:pPr marL="0" indent="0" algn="l">
               <a:lnSpc>
                 <a:spcPts val="1960"/>
               </a:lnSpc>
@@ -2238,6 +2034,13 @@
             <a:prstDash val="solid"/>
           </a:ln>
         </p:spPr>
+        <p:txBody>
+          <a:bodyPr/>
+          <a:lstStyle/>
+          <a:p>
+            <a:endParaRPr lang="en-DE"/>
+          </a:p>
+        </p:txBody>
       </p:sp>
       <p:sp>
         <p:nvSpPr>
@@ -2262,7 +2065,7 @@
           </a:bodyPr>
           <a:lstStyle/>
           <a:p>
-            <a:pPr algn="l" indent="0" marL="0">
+            <a:pPr marL="0" indent="0" algn="l">
               <a:lnSpc>
                 <a:spcPts val="2160"/>
               </a:lnSpc>
@@ -2306,7 +2109,7 @@
           </a:bodyPr>
           <a:lstStyle/>
           <a:p>
-            <a:pPr algn="l" indent="0" marL="0">
+            <a:pPr marL="0" indent="0" algn="l">
               <a:lnSpc>
                 <a:spcPts val="1960"/>
               </a:lnSpc>
@@ -2353,6 +2156,13 @@
             <a:prstDash val="solid"/>
           </a:ln>
         </p:spPr>
+        <p:txBody>
+          <a:bodyPr/>
+          <a:lstStyle/>
+          <a:p>
+            <a:endParaRPr lang="en-DE"/>
+          </a:p>
+        </p:txBody>
       </p:sp>
       <p:sp>
         <p:nvSpPr>
@@ -2377,7 +2187,7 @@
           </a:bodyPr>
           <a:lstStyle/>
           <a:p>
-            <a:pPr algn="l" indent="0" marL="0">
+            <a:pPr marL="0" indent="0" algn="l">
               <a:lnSpc>
                 <a:spcPts val="2160"/>
               </a:lnSpc>
@@ -2421,7 +2231,7 @@
           </a:bodyPr>
           <a:lstStyle/>
           <a:p>
-            <a:pPr algn="l" indent="0" marL="0">
+            <a:pPr marL="0" indent="0" algn="l">
               <a:lnSpc>
                 <a:spcPts val="1960"/>
               </a:lnSpc>
@@ -2463,18 +2273,25 @@
           </a:solidFill>
           <a:ln/>
         </p:spPr>
+        <p:txBody>
+          <a:bodyPr/>
+          <a:lstStyle/>
+          <a:p>
+            <a:endParaRPr lang="en-DE"/>
+          </a:p>
+        </p:txBody>
       </p:sp>
       <p:pic>
         <p:nvPicPr>
-          <p:cNvPr id="14" name="Image 0" descr="Warning">    </p:cNvPr>
+          <p:cNvPr id="14" name="Image 0" descr="Warning"/>
           <p:cNvPicPr>
             <a:picLocks noChangeAspect="1"/>
           </p:cNvPicPr>
           <p:nvPr/>
         </p:nvPicPr>
         <p:blipFill>
-          <a:blip r:embed="rId1"/>
-          <a:srcRect l="0" r="0" t="0" b="0"/>
+          <a:blip r:embed="rId3"/>
+          <a:srcRect/>
           <a:stretch/>
         </p:blipFill>
         <p:spPr>
@@ -2510,7 +2327,7 @@
           </a:bodyPr>
           <a:lstStyle/>
           <a:p>
-            <a:pPr algn="l" indent="0" marL="0">
+            <a:pPr marL="0" indent="0" algn="l">
               <a:lnSpc>
                 <a:spcPts val="1960"/>
               </a:lnSpc>
@@ -2558,6 +2375,7 @@
         <a:solidFill>
           <a:srgbClr val="F5F4EF"/>
         </a:solidFill>
+        <a:effectLst/>
       </p:bgPr>
     </p:bg>
     <p:spTree>
@@ -2597,14 +2415,14 @@
           </a:bodyPr>
           <a:lstStyle/>
           <a:p>
-            <a:pPr algn="l" indent="0" marL="0">
+            <a:pPr marL="0" indent="0" algn="l">
               <a:lnSpc>
                 <a:spcPts val="1680"/>
               </a:lnSpc>
               <a:buNone/>
             </a:pPr>
             <a:r>
-              <a:rPr lang="en-US" sz="1200" b="1" spc="200" kern="0" dirty="0">
+              <a:rPr lang="en-US" sz="1200" b="1" kern="0" spc="200" dirty="0">
                 <a:solidFill>
                   <a:srgbClr val="1D7368"/>
                 </a:solidFill>
@@ -2621,7 +2439,9 @@
       <p:sp>
         <p:nvSpPr>
           <p:cNvPr id="3" name="Text 1"/>
-          <p:cNvSpPr/>
+          <p:cNvSpPr>
+            <a:spLocks noGrp="1"/>
+          </p:cNvSpPr>
           <p:nvPr>
             <p:ph type="title"/>
           </p:nvPr>
@@ -2643,7 +2463,7 @@
           </a:bodyPr>
           <a:lstStyle/>
           <a:p>
-            <a:pPr algn="l" indent="0" marL="0">
+            <a:pPr marL="0" indent="0" algn="l">
               <a:lnSpc>
                 <a:spcPts val="3960"/>
               </a:lnSpc>
@@ -2687,7 +2507,7 @@
           </a:bodyPr>
           <a:lstStyle/>
           <a:p>
-            <a:pPr algn="l" indent="0" marL="0">
+            <a:pPr marL="0" indent="0" algn="l">
               <a:lnSpc>
                 <a:spcPts val="2160"/>
               </a:lnSpc>
@@ -2731,7 +2551,7 @@
           </a:bodyPr>
           <a:lstStyle/>
           <a:p>
-            <a:pPr algn="l" indent="0" marL="0">
+            <a:pPr marL="0" indent="0" algn="l">
               <a:lnSpc>
                 <a:spcPts val="1960"/>
               </a:lnSpc>
@@ -2775,7 +2595,7 @@
           </a:bodyPr>
           <a:lstStyle/>
           <a:p>
-            <a:pPr algn="l" indent="0" marL="0">
+            <a:pPr marL="0" indent="0" algn="l">
               <a:lnSpc>
                 <a:spcPts val="2160"/>
               </a:lnSpc>
@@ -2819,7 +2639,7 @@
           </a:bodyPr>
           <a:lstStyle/>
           <a:p>
-            <a:pPr algn="l" indent="0" marL="0">
+            <a:pPr marL="0" indent="0" algn="l">
               <a:lnSpc>
                 <a:spcPts val="1960"/>
               </a:lnSpc>
@@ -2863,7 +2683,7 @@
           </a:bodyPr>
           <a:lstStyle/>
           <a:p>
-            <a:pPr algn="l" indent="0" marL="0">
+            <a:pPr marL="0" indent="0" algn="l">
               <a:lnSpc>
                 <a:spcPts val="2160"/>
               </a:lnSpc>
@@ -2907,7 +2727,7 @@
           </a:bodyPr>
           <a:lstStyle/>
           <a:p>
-            <a:pPr algn="l" indent="0" marL="0">
+            <a:pPr marL="0" indent="0" algn="l">
               <a:lnSpc>
                 <a:spcPts val="1960"/>
               </a:lnSpc>
@@ -2954,6 +2774,13 @@
             <a:prstDash val="solid"/>
           </a:ln>
         </p:spPr>
+        <p:txBody>
+          <a:bodyPr/>
+          <a:lstStyle/>
+          <a:p>
+            <a:endParaRPr lang="en-DE"/>
+          </a:p>
+        </p:txBody>
       </p:sp>
       <p:sp>
         <p:nvSpPr>
@@ -2978,7 +2805,7 @@
           </a:bodyPr>
           <a:lstStyle/>
           <a:p>
-            <a:pPr algn="l" indent="0" marL="0">
+            <a:pPr marL="0" indent="0" algn="l">
               <a:lnSpc>
                 <a:spcPts val="2160"/>
               </a:lnSpc>
@@ -3022,7 +2849,7 @@
           </a:bodyPr>
           <a:lstStyle/>
           <a:p>
-            <a:pPr algn="l" indent="0" marL="0">
+            <a:pPr marL="0" indent="0" algn="l">
               <a:lnSpc>
                 <a:spcPts val="1820"/>
               </a:lnSpc>
@@ -3069,6 +2896,13 @@
             <a:prstDash val="solid"/>
           </a:ln>
         </p:spPr>
+        <p:txBody>
+          <a:bodyPr/>
+          <a:lstStyle/>
+          <a:p>
+            <a:endParaRPr lang="en-DE"/>
+          </a:p>
+        </p:txBody>
       </p:sp>
       <p:sp>
         <p:nvSpPr>
@@ -3093,7 +2927,7 @@
           </a:bodyPr>
           <a:lstStyle/>
           <a:p>
-            <a:pPr algn="l" indent="0" marL="0">
+            <a:pPr marL="0" indent="0" algn="l">
               <a:lnSpc>
                 <a:spcPts val="2160"/>
               </a:lnSpc>
@@ -3137,7 +2971,7 @@
           </a:bodyPr>
           <a:lstStyle/>
           <a:p>
-            <a:pPr algn="l" indent="0" marL="0">
+            <a:pPr marL="0" indent="0" algn="l">
               <a:lnSpc>
                 <a:spcPts val="1820"/>
               </a:lnSpc>
@@ -3184,6 +3018,13 @@
             <a:prstDash val="solid"/>
           </a:ln>
         </p:spPr>
+        <p:txBody>
+          <a:bodyPr/>
+          <a:lstStyle/>
+          <a:p>
+            <a:endParaRPr lang="en-DE"/>
+          </a:p>
+        </p:txBody>
       </p:sp>
       <p:sp>
         <p:nvSpPr>
@@ -3208,7 +3049,7 @@
           </a:bodyPr>
           <a:lstStyle/>
           <a:p>
-            <a:pPr algn="l" indent="0" marL="0">
+            <a:pPr marL="0" indent="0" algn="l">
               <a:lnSpc>
                 <a:spcPts val="2160"/>
               </a:lnSpc>
@@ -3252,7 +3093,7 @@
           </a:bodyPr>
           <a:lstStyle/>
           <a:p>
-            <a:pPr algn="l" indent="0" marL="0">
+            <a:pPr marL="0" indent="0" algn="l">
               <a:lnSpc>
                 <a:spcPts val="1820"/>
               </a:lnSpc>
@@ -3299,6 +3140,13 @@
             <a:prstDash val="dash"/>
           </a:ln>
         </p:spPr>
+        <p:txBody>
+          <a:bodyPr/>
+          <a:lstStyle/>
+          <a:p>
+            <a:endParaRPr lang="en-DE"/>
+          </a:p>
+        </p:txBody>
       </p:sp>
       <p:sp>
         <p:nvSpPr>
@@ -3323,7 +3171,7 @@
           </a:bodyPr>
           <a:lstStyle/>
           <a:p>
-            <a:pPr algn="l" indent="0" marL="0">
+            <a:pPr marL="0" indent="0" algn="l">
               <a:lnSpc>
                 <a:spcPts val="2160"/>
               </a:lnSpc>
@@ -3367,7 +3215,7 @@
           </a:bodyPr>
           <a:lstStyle/>
           <a:p>
-            <a:pPr algn="l" indent="0" marL="0">
+            <a:pPr marL="0" indent="0" algn="l">
               <a:lnSpc>
                 <a:spcPts val="1820"/>
               </a:lnSpc>
@@ -3404,6 +3252,7 @@
         <a:solidFill>
           <a:srgbClr val="F5F4EF"/>
         </a:solidFill>
+        <a:effectLst/>
       </p:bgPr>
     </p:bg>
     <p:spTree>
@@ -3443,7 +3292,7 @@
           </a:bodyPr>
           <a:lstStyle/>
           <a:p>
-            <a:pPr algn="l" indent="0" marL="0">
+            <a:pPr marL="0" indent="0" algn="l">
               <a:lnSpc>
                 <a:spcPts val="1680"/>
               </a:lnSpc>
@@ -3487,14 +3336,14 @@
           </a:bodyPr>
           <a:lstStyle/>
           <a:p>
-            <a:pPr algn="l" indent="0" marL="0">
+            <a:pPr marL="0" indent="0" algn="l">
               <a:lnSpc>
                 <a:spcPts val="1680"/>
               </a:lnSpc>
               <a:buNone/>
             </a:pPr>
             <a:r>
-              <a:rPr lang="en-US" sz="1200" b="1" spc="200" kern="0" dirty="0">
+              <a:rPr lang="en-US" sz="1200" b="1" kern="0" spc="200" dirty="0">
                 <a:solidFill>
                   <a:srgbClr val="1D7368"/>
                 </a:solidFill>
@@ -3511,7 +3360,9 @@
       <p:sp>
         <p:nvSpPr>
           <p:cNvPr id="4" name="Text 2"/>
-          <p:cNvSpPr/>
+          <p:cNvSpPr>
+            <a:spLocks noGrp="1"/>
+          </p:cNvSpPr>
           <p:nvPr>
             <p:ph type="title"/>
           </p:nvPr>
@@ -3533,7 +3384,7 @@
           </a:bodyPr>
           <a:lstStyle/>
           <a:p>
-            <a:pPr algn="l" indent="0" marL="0">
+            <a:pPr marL="0" indent="0" algn="l">
               <a:lnSpc>
                 <a:spcPts val="3960"/>
               </a:lnSpc>
@@ -3580,6 +3431,13 @@
             <a:prstDash val="solid"/>
           </a:ln>
         </p:spPr>
+        <p:txBody>
+          <a:bodyPr/>
+          <a:lstStyle/>
+          <a:p>
+            <a:endParaRPr lang="en-DE"/>
+          </a:p>
+        </p:txBody>
       </p:sp>
       <p:sp>
         <p:nvSpPr>
@@ -3604,7 +3462,7 @@
           </a:bodyPr>
           <a:lstStyle/>
           <a:p>
-            <a:pPr algn="l" indent="0" marL="0">
+            <a:pPr marL="0" indent="0" algn="l">
               <a:lnSpc>
                 <a:spcPts val="1920"/>
               </a:lnSpc>
@@ -3648,7 +3506,7 @@
           </a:bodyPr>
           <a:lstStyle/>
           <a:p>
-            <a:pPr algn="l" indent="0" marL="0">
+            <a:pPr marL="0" indent="0" algn="l">
               <a:lnSpc>
                 <a:spcPts val="1680"/>
               </a:lnSpc>
@@ -3695,6 +3553,13 @@
             <a:prstDash val="solid"/>
           </a:ln>
         </p:spPr>
+        <p:txBody>
+          <a:bodyPr/>
+          <a:lstStyle/>
+          <a:p>
+            <a:endParaRPr lang="en-DE"/>
+          </a:p>
+        </p:txBody>
       </p:sp>
       <p:sp>
         <p:nvSpPr>
@@ -3719,7 +3584,7 @@
           </a:bodyPr>
           <a:lstStyle/>
           <a:p>
-            <a:pPr algn="l" indent="0" marL="0">
+            <a:pPr marL="0" indent="0" algn="l">
               <a:lnSpc>
                 <a:spcPts val="1920"/>
               </a:lnSpc>
@@ -3763,7 +3628,7 @@
           </a:bodyPr>
           <a:lstStyle/>
           <a:p>
-            <a:pPr algn="l" indent="0" marL="0">
+            <a:pPr marL="0" indent="0" algn="l">
               <a:lnSpc>
                 <a:spcPts val="1680"/>
               </a:lnSpc>
@@ -3810,6 +3675,13 @@
             <a:prstDash val="solid"/>
           </a:ln>
         </p:spPr>
+        <p:txBody>
+          <a:bodyPr/>
+          <a:lstStyle/>
+          <a:p>
+            <a:endParaRPr lang="en-DE"/>
+          </a:p>
+        </p:txBody>
       </p:sp>
       <p:sp>
         <p:nvSpPr>
@@ -3834,7 +3706,7 @@
           </a:bodyPr>
           <a:lstStyle/>
           <a:p>
-            <a:pPr algn="l" indent="0" marL="0">
+            <a:pPr marL="0" indent="0" algn="l">
               <a:lnSpc>
                 <a:spcPts val="1920"/>
               </a:lnSpc>
@@ -3878,7 +3750,7 @@
           </a:bodyPr>
           <a:lstStyle/>
           <a:p>
-            <a:pPr algn="l" indent="0" marL="0">
+            <a:pPr marL="0" indent="0" algn="l">
               <a:lnSpc>
                 <a:spcPts val="1680"/>
               </a:lnSpc>
@@ -3901,15 +3773,15 @@
       </p:sp>
       <p:pic>
         <p:nvPicPr>
-          <p:cNvPr id="14" name="Image 0" descr="arrow-down">    </p:cNvPr>
+          <p:cNvPr id="14" name="Image 0" descr="arrow-down"/>
           <p:cNvPicPr>
             <a:picLocks noChangeAspect="1"/>
           </p:cNvPicPr>
           <p:nvPr/>
         </p:nvPicPr>
         <p:blipFill>
-          <a:blip r:embed="rId1"/>
-          <a:srcRect l="0" r="0" t="0" b="0"/>
+          <a:blip r:embed="rId3"/>
+          <a:srcRect/>
           <a:stretch/>
         </p:blipFill>
         <p:spPr>
@@ -3924,15 +3796,15 @@
       </p:pic>
       <p:pic>
         <p:nvPicPr>
-          <p:cNvPr id="15" name="Image 1" descr="arrow-down">    </p:cNvPr>
+          <p:cNvPr id="15" name="Image 1" descr="arrow-down"/>
           <p:cNvPicPr>
             <a:picLocks noChangeAspect="1"/>
           </p:cNvPicPr>
           <p:nvPr/>
         </p:nvPicPr>
         <p:blipFill>
-          <a:blip r:embed="rId2"/>
-          <a:srcRect l="0" r="0" t="0" b="0"/>
+          <a:blip r:embed="rId3"/>
+          <a:srcRect/>
           <a:stretch/>
         </p:blipFill>
         <p:spPr>
@@ -3947,7 +3819,7 @@
       </p:pic>
       <p:pic>
         <p:nvPicPr>
-          <p:cNvPr id="16" name="Image 2" descr="arrow-down">    </p:cNvPr>
+          <p:cNvPr id="16" name="Image 2" descr="arrow-down"/>
           <p:cNvPicPr>
             <a:picLocks noChangeAspect="1"/>
           </p:cNvPicPr>
@@ -3955,7 +3827,7 @@
         </p:nvPicPr>
         <p:blipFill>
           <a:blip r:embed="rId3"/>
-          <a:srcRect l="0" r="0" t="0" b="0"/>
+          <a:srcRect/>
           <a:stretch/>
         </p:blipFill>
         <p:spPr>
@@ -3989,10 +3861,17 @@
           </a:solidFill>
           <a:ln/>
         </p:spPr>
+        <p:txBody>
+          <a:bodyPr/>
+          <a:lstStyle/>
+          <a:p>
+            <a:endParaRPr lang="en-DE" dirty="0"/>
+          </a:p>
+        </p:txBody>
       </p:sp>
       <p:pic>
         <p:nvPicPr>
-          <p:cNvPr id="18" name="Image 3" descr="Lock">    </p:cNvPr>
+          <p:cNvPr id="18" name="Image 3" descr="Lock"/>
           <p:cNvPicPr>
             <a:picLocks noChangeAspect="1"/>
           </p:cNvPicPr>
@@ -4000,7 +3879,7 @@
         </p:nvPicPr>
         <p:blipFill>
           <a:blip r:embed="rId4"/>
-          <a:srcRect l="0" r="0" t="0" b="0"/>
+          <a:srcRect/>
           <a:stretch/>
         </p:blipFill>
         <p:spPr>
@@ -4036,22 +3915,41 @@
           </a:bodyPr>
           <a:lstStyle/>
           <a:p>
-            <a:pPr algn="l" indent="0" marL="0">
+            <a:pPr marL="0" indent="0" algn="l">
               <a:lnSpc>
                 <a:spcPts val="2160"/>
               </a:lnSpc>
               <a:buNone/>
             </a:pPr>
             <a:r>
-              <a:rPr lang="en-US" sz="1800" b="1" dirty="0">
+              <a:rPr lang="en-US" b="1" dirty="0" err="1">
                 <a:solidFill>
                   <a:srgbClr val="F5F4EF"/>
                 </a:solidFill>
                 <a:latin typeface="Space Grotesk" pitchFamily="34" charset="0"/>
                 <a:ea typeface="Space Grotesk" pitchFamily="34" charset="-122"/>
-                <a:cs typeface="Space Grotesk" pitchFamily="34" charset="-120"/>
-              </a:rPr>
-              <a:t>Kryptokern als eigenständige Rust-Bibliothek</a:t>
+              </a:rPr>
+              <a:t>Zweigleisiger</a:t>
+            </a:r>
+            <a:r>
+              <a:rPr lang="en-US" b="1" dirty="0">
+                <a:solidFill>
+                  <a:srgbClr val="F5F4EF"/>
+                </a:solidFill>
+                <a:latin typeface="Space Grotesk" pitchFamily="34" charset="0"/>
+                <a:ea typeface="Space Grotesk" pitchFamily="34" charset="-122"/>
+              </a:rPr>
+              <a:t> </a:t>
+            </a:r>
+            <a:r>
+              <a:rPr lang="en-US" b="1" dirty="0" err="1">
+                <a:solidFill>
+                  <a:srgbClr val="F5F4EF"/>
+                </a:solidFill>
+                <a:latin typeface="Space Grotesk" pitchFamily="34" charset="0"/>
+                <a:ea typeface="Space Grotesk" pitchFamily="34" charset="-122"/>
+              </a:rPr>
+              <a:t>Kryptokern</a:t>
             </a:r>
             <a:endParaRPr lang="en-US" sz="1800" dirty="0"/>
           </a:p>
@@ -4076,11 +3974,11 @@
         </p:spPr>
         <p:txBody>
           <a:bodyPr wrap="square" lIns="0" tIns="0" rIns="0" bIns="0" rtlCol="0" anchor="t">
-            <a:normAutofit/>
-          </a:bodyPr>
-          <a:lstStyle/>
-          <a:p>
-            <a:pPr algn="l" indent="0" marL="0">
+            <a:normAutofit fontScale="92500"/>
+          </a:bodyPr>
+          <a:lstStyle/>
+          <a:p>
+            <a:pPr marL="0" indent="0" algn="l">
               <a:lnSpc>
                 <a:spcPts val="1820"/>
               </a:lnSpc>
@@ -4095,7 +3993,73 @@
                 <a:ea typeface="IBM Plex Sans" pitchFamily="34" charset="-122"/>
                 <a:cs typeface="IBM Plex Sans" pitchFamily="34" charset="-120"/>
               </a:rPr>
-              <a:t>Eigenes Dateiformat mit hybrider Post-Quanten-Kryptografie (X25519 + ML-KEM) · age-Format als erprobter Fallback</a:t>
+              <a:t>Eigenes Dateiformat mit hybrider Post-Quanten-Kryptografie (X25519 + ML-KEM) </a:t>
+            </a:r>
+            <a:r>
+              <a:rPr lang="en-US" sz="1300" dirty="0" err="1">
+                <a:solidFill>
+                  <a:srgbClr val="C9D6DE"/>
+                </a:solidFill>
+                <a:latin typeface="IBM Plex Sans" pitchFamily="34" charset="0"/>
+                <a:ea typeface="IBM Plex Sans" pitchFamily="34" charset="-122"/>
+                <a:cs typeface="IBM Plex Sans" pitchFamily="34" charset="-120"/>
+              </a:rPr>
+              <a:t>mit</a:t>
+            </a:r>
+            <a:r>
+              <a:rPr lang="en-US" sz="1300" dirty="0">
+                <a:solidFill>
+                  <a:srgbClr val="C9D6DE"/>
+                </a:solidFill>
+                <a:latin typeface="IBM Plex Sans" pitchFamily="34" charset="0"/>
+                <a:ea typeface="IBM Plex Sans" pitchFamily="34" charset="-122"/>
+                <a:cs typeface="IBM Plex Sans" pitchFamily="34" charset="-120"/>
+              </a:rPr>
+              <a:t> </a:t>
+            </a:r>
+            <a:r>
+              <a:rPr lang="en-US" sz="1300" dirty="0" err="1">
+                <a:solidFill>
+                  <a:srgbClr val="C9D6DE"/>
+                </a:solidFill>
+                <a:latin typeface="IBM Plex Sans" pitchFamily="34" charset="0"/>
+                <a:ea typeface="IBM Plex Sans" pitchFamily="34" charset="-122"/>
+                <a:cs typeface="IBM Plex Sans" pitchFamily="34" charset="-120"/>
+              </a:rPr>
+              <a:t>aws</a:t>
+            </a:r>
+            <a:r>
+              <a:rPr lang="en-US" sz="1300" dirty="0">
+                <a:solidFill>
+                  <a:srgbClr val="C9D6DE"/>
+                </a:solidFill>
+                <a:latin typeface="IBM Plex Sans" pitchFamily="34" charset="0"/>
+                <a:ea typeface="IBM Plex Sans" pitchFamily="34" charset="-122"/>
+                <a:cs typeface="IBM Plex Sans" pitchFamily="34" charset="-120"/>
+              </a:rPr>
+              <a:t>-lc-</a:t>
+            </a:r>
+            <a:r>
+              <a:rPr lang="en-US" sz="1300" dirty="0" err="1">
+                <a:solidFill>
+                  <a:srgbClr val="C9D6DE"/>
+                </a:solidFill>
+                <a:latin typeface="IBM Plex Sans" pitchFamily="34" charset="0"/>
+                <a:ea typeface="IBM Plex Sans" pitchFamily="34" charset="-122"/>
+                <a:cs typeface="IBM Plex Sans" pitchFamily="34" charset="-120"/>
+              </a:rPr>
+              <a:t>rs</a:t>
+            </a:r>
+            <a:r>
+              <a:rPr lang="en-US" sz="1300" dirty="0">
+                <a:solidFill>
+                  <a:srgbClr val="C9D6DE"/>
+                </a:solidFill>
+                <a:latin typeface="IBM Plex Sans" pitchFamily="34" charset="0"/>
+                <a:ea typeface="IBM Plex Sans" pitchFamily="34" charset="-122"/>
+                <a:cs typeface="IBM Plex Sans" pitchFamily="34" charset="-120"/>
+              </a:rPr>
+              <a:t>· age-Format als erprobter Fallback</a:t>
             </a:r>
             <a:endParaRPr lang="en-US" sz="1300" dirty="0"/>
           </a:p>
@@ -4128,7 +4092,7 @@
           </a:bodyPr>
           <a:lstStyle/>
           <a:p>
-            <a:pPr algn="ctr" indent="0" marL="0">
+            <a:pPr marL="0" indent="0" algn="ctr">
               <a:lnSpc>
                 <a:spcPts val="1680"/>
               </a:lnSpc>
@@ -4176,7 +4140,7 @@
           </a:bodyPr>
           <a:lstStyle/>
           <a:p>
-            <a:pPr algn="ctr" indent="0" marL="0">
+            <a:pPr marL="0" indent="0" algn="ctr">
               <a:lnSpc>
                 <a:spcPts val="1680"/>
               </a:lnSpc>
@@ -4224,7 +4188,7 @@
           </a:bodyPr>
           <a:lstStyle/>
           <a:p>
-            <a:pPr algn="ctr" indent="0" marL="0">
+            <a:pPr marL="0" indent="0" algn="ctr">
               <a:lnSpc>
                 <a:spcPts val="1680"/>
               </a:lnSpc>
@@ -4272,7 +4236,7 @@
           </a:bodyPr>
           <a:lstStyle/>
           <a:p>
-            <a:pPr algn="ctr" indent="0" marL="0">
+            <a:pPr marL="0" indent="0" algn="ctr">
               <a:lnSpc>
                 <a:spcPts val="1680"/>
               </a:lnSpc>
@@ -4309,6 +4273,7 @@
         <a:solidFill>
           <a:srgbClr val="F5F4EF"/>
         </a:solidFill>
+        <a:effectLst/>
       </p:bgPr>
     </p:bg>
     <p:spTree>
@@ -4348,14 +4313,14 @@
           </a:bodyPr>
           <a:lstStyle/>
           <a:p>
-            <a:pPr algn="l" indent="0" marL="0">
+            <a:pPr marL="0" indent="0" algn="l">
               <a:lnSpc>
                 <a:spcPts val="1680"/>
               </a:lnSpc>
               <a:buNone/>
             </a:pPr>
             <a:r>
-              <a:rPr lang="en-US" sz="1200" b="1" spc="200" kern="0" dirty="0">
+              <a:rPr lang="en-US" sz="1200" b="1" kern="0" spc="200" dirty="0">
                 <a:solidFill>
                   <a:srgbClr val="1D7368"/>
                 </a:solidFill>
@@ -4372,7 +4337,9 @@
       <p:sp>
         <p:nvSpPr>
           <p:cNvPr id="3" name="Text 1"/>
-          <p:cNvSpPr/>
+          <p:cNvSpPr>
+            <a:spLocks noGrp="1"/>
+          </p:cNvSpPr>
           <p:nvPr>
             <p:ph type="title"/>
           </p:nvPr>
@@ -4394,7 +4361,7 @@
           </a:bodyPr>
           <a:lstStyle/>
           <a:p>
-            <a:pPr algn="l" indent="0" marL="0">
+            <a:pPr marL="0" indent="0" algn="l">
               <a:lnSpc>
                 <a:spcPts val="3960"/>
               </a:lnSpc>
@@ -4441,6 +4408,13 @@
             <a:prstDash val="solid"/>
           </a:ln>
         </p:spPr>
+        <p:txBody>
+          <a:bodyPr/>
+          <a:lstStyle/>
+          <a:p>
+            <a:endParaRPr lang="en-DE"/>
+          </a:p>
+        </p:txBody>
       </p:sp>
       <p:sp>
         <p:nvSpPr>
@@ -4465,7 +4439,7 @@
           </a:bodyPr>
           <a:lstStyle/>
           <a:p>
-            <a:pPr algn="l" indent="0" marL="0">
+            <a:pPr marL="0" indent="0" algn="l">
               <a:lnSpc>
                 <a:spcPts val="1680"/>
               </a:lnSpc>
@@ -4509,7 +4483,7 @@
           </a:bodyPr>
           <a:lstStyle/>
           <a:p>
-            <a:pPr algn="l" indent="0" marL="0">
+            <a:pPr marL="0" indent="0" algn="l">
               <a:lnSpc>
                 <a:spcPts val="2160"/>
               </a:lnSpc>
@@ -4553,7 +4527,7 @@
           </a:bodyPr>
           <a:lstStyle/>
           <a:p>
-            <a:pPr algn="l" indent="0" marL="0">
+            <a:pPr marL="0" indent="0" algn="l">
               <a:lnSpc>
                 <a:spcPts val="1820"/>
               </a:lnSpc>
@@ -4576,15 +4550,15 @@
       </p:sp>
       <p:pic>
         <p:nvPicPr>
-          <p:cNvPr id="8" name="Image 0" descr="arrow-right">    </p:cNvPr>
+          <p:cNvPr id="8" name="Image 0" descr="arrow-right"/>
           <p:cNvPicPr>
             <a:picLocks noChangeAspect="1"/>
           </p:cNvPicPr>
           <p:nvPr/>
         </p:nvPicPr>
         <p:blipFill>
-          <a:blip r:embed="rId1"/>
-          <a:srcRect l="0" r="0" t="0" b="0"/>
+          <a:blip r:embed="rId3"/>
+          <a:srcRect/>
           <a:stretch/>
         </p:blipFill>
         <p:spPr>
@@ -4623,6 +4597,13 @@
             <a:prstDash val="solid"/>
           </a:ln>
         </p:spPr>
+        <p:txBody>
+          <a:bodyPr/>
+          <a:lstStyle/>
+          <a:p>
+            <a:endParaRPr lang="en-DE"/>
+          </a:p>
+        </p:txBody>
       </p:sp>
       <p:sp>
         <p:nvSpPr>
@@ -4647,7 +4628,7 @@
           </a:bodyPr>
           <a:lstStyle/>
           <a:p>
-            <a:pPr algn="l" indent="0" marL="0">
+            <a:pPr marL="0" indent="0" algn="l">
               <a:lnSpc>
                 <a:spcPts val="1680"/>
               </a:lnSpc>
@@ -4691,7 +4672,7 @@
           </a:bodyPr>
           <a:lstStyle/>
           <a:p>
-            <a:pPr algn="l" indent="0" marL="0">
+            <a:pPr marL="0" indent="0" algn="l">
               <a:lnSpc>
                 <a:spcPts val="2160"/>
               </a:lnSpc>
@@ -4735,7 +4716,7 @@
           </a:bodyPr>
           <a:lstStyle/>
           <a:p>
-            <a:pPr algn="l" indent="0" marL="0">
+            <a:pPr marL="0" indent="0" algn="l">
               <a:lnSpc>
                 <a:spcPts val="1820"/>
               </a:lnSpc>
@@ -4758,15 +4739,15 @@
       </p:sp>
       <p:pic>
         <p:nvPicPr>
-          <p:cNvPr id="13" name="Image 1" descr="arrow-right">    </p:cNvPr>
+          <p:cNvPr id="13" name="Image 1" descr="arrow-right"/>
           <p:cNvPicPr>
             <a:picLocks noChangeAspect="1"/>
           </p:cNvPicPr>
           <p:nvPr/>
         </p:nvPicPr>
         <p:blipFill>
-          <a:blip r:embed="rId2"/>
-          <a:srcRect l="0" r="0" t="0" b="0"/>
+          <a:blip r:embed="rId3"/>
+          <a:srcRect/>
           <a:stretch/>
         </p:blipFill>
         <p:spPr>
@@ -4805,6 +4786,13 @@
             <a:prstDash val="solid"/>
           </a:ln>
         </p:spPr>
+        <p:txBody>
+          <a:bodyPr/>
+          <a:lstStyle/>
+          <a:p>
+            <a:endParaRPr lang="en-DE"/>
+          </a:p>
+        </p:txBody>
       </p:sp>
       <p:sp>
         <p:nvSpPr>
@@ -4829,7 +4817,7 @@
           </a:bodyPr>
           <a:lstStyle/>
           <a:p>
-            <a:pPr algn="l" indent="0" marL="0">
+            <a:pPr marL="0" indent="0" algn="l">
               <a:lnSpc>
                 <a:spcPts val="1680"/>
               </a:lnSpc>
@@ -4873,7 +4861,7 @@
           </a:bodyPr>
           <a:lstStyle/>
           <a:p>
-            <a:pPr algn="l" indent="0" marL="0">
+            <a:pPr marL="0" indent="0" algn="l">
               <a:lnSpc>
                 <a:spcPts val="2160"/>
               </a:lnSpc>
@@ -4917,7 +4905,7 @@
           </a:bodyPr>
           <a:lstStyle/>
           <a:p>
-            <a:pPr algn="l" indent="0" marL="0">
+            <a:pPr marL="0" indent="0" algn="l">
               <a:lnSpc>
                 <a:spcPts val="1820"/>
               </a:lnSpc>
@@ -4940,7 +4928,7 @@
       </p:sp>
       <p:pic>
         <p:nvPicPr>
-          <p:cNvPr id="18" name="Image 2" descr="arrow-right">    </p:cNvPr>
+          <p:cNvPr id="18" name="Image 2" descr="arrow-right"/>
           <p:cNvPicPr>
             <a:picLocks noChangeAspect="1"/>
           </p:cNvPicPr>
@@ -4948,7 +4936,7 @@
         </p:nvPicPr>
         <p:blipFill>
           <a:blip r:embed="rId3"/>
-          <a:srcRect l="0" r="0" t="0" b="0"/>
+          <a:srcRect/>
           <a:stretch/>
         </p:blipFill>
         <p:spPr>
@@ -4987,6 +4975,13 @@
             <a:prstDash val="solid"/>
           </a:ln>
         </p:spPr>
+        <p:txBody>
+          <a:bodyPr/>
+          <a:lstStyle/>
+          <a:p>
+            <a:endParaRPr lang="en-DE"/>
+          </a:p>
+        </p:txBody>
       </p:sp>
       <p:sp>
         <p:nvSpPr>
@@ -5011,7 +5006,7 @@
           </a:bodyPr>
           <a:lstStyle/>
           <a:p>
-            <a:pPr algn="l" indent="0" marL="0">
+            <a:pPr marL="0" indent="0" algn="l">
               <a:lnSpc>
                 <a:spcPts val="1680"/>
               </a:lnSpc>
@@ -5055,7 +5050,7 @@
           </a:bodyPr>
           <a:lstStyle/>
           <a:p>
-            <a:pPr algn="l" indent="0" marL="0">
+            <a:pPr marL="0" indent="0" algn="l">
               <a:lnSpc>
                 <a:spcPts val="2160"/>
               </a:lnSpc>
@@ -5099,7 +5094,7 @@
           </a:bodyPr>
           <a:lstStyle/>
           <a:p>
-            <a:pPr algn="l" indent="0" marL="0">
+            <a:pPr marL="0" indent="0" algn="l">
               <a:lnSpc>
                 <a:spcPts val="1820"/>
               </a:lnSpc>
@@ -5143,7 +5138,7 @@
           </a:bodyPr>
           <a:lstStyle/>
           <a:p>
-            <a:pPr algn="l" indent="0" marL="0">
+            <a:pPr marL="0" indent="0" algn="l">
               <a:lnSpc>
                 <a:spcPts val="2240"/>
               </a:lnSpc>
@@ -5180,6 +5175,7 @@
         <a:solidFill>
           <a:srgbClr val="12202B"/>
         </a:solidFill>
+        <a:effectLst/>
       </p:bgPr>
     </p:bg>
     <p:spTree>
@@ -5219,14 +5215,14 @@
           </a:bodyPr>
           <a:lstStyle/>
           <a:p>
-            <a:pPr algn="l" indent="0" marL="0">
+            <a:pPr marL="0" indent="0" algn="l">
               <a:lnSpc>
                 <a:spcPts val="1680"/>
               </a:lnSpc>
               <a:buNone/>
             </a:pPr>
             <a:r>
-              <a:rPr lang="en-US" sz="1200" b="1" spc="200" kern="0" dirty="0">
+              <a:rPr lang="en-US" sz="1200" b="1" kern="0" spc="200" dirty="0">
                 <a:solidFill>
                   <a:srgbClr val="7FD6C8"/>
                 </a:solidFill>
@@ -5243,7 +5239,9 @@
       <p:sp>
         <p:nvSpPr>
           <p:cNvPr id="3" name="Text 1"/>
-          <p:cNvSpPr/>
+          <p:cNvSpPr>
+            <a:spLocks noGrp="1"/>
+          </p:cNvSpPr>
           <p:nvPr>
             <p:ph type="title"/>
           </p:nvPr>
@@ -5265,7 +5263,7 @@
           </a:bodyPr>
           <a:lstStyle/>
           <a:p>
-            <a:pPr algn="l" indent="0" marL="0">
+            <a:pPr marL="0" indent="0" algn="l">
               <a:lnSpc>
                 <a:spcPts val="3960"/>
               </a:lnSpc>
@@ -5307,18 +5305,25 @@
           </a:solidFill>
           <a:ln/>
         </p:spPr>
+        <p:txBody>
+          <a:bodyPr/>
+          <a:lstStyle/>
+          <a:p>
+            <a:endParaRPr lang="en-DE"/>
+          </a:p>
+        </p:txBody>
       </p:sp>
       <p:pic>
         <p:nvPicPr>
-          <p:cNvPr id="5" name="Image 0" descr="Users">    </p:cNvPr>
+          <p:cNvPr id="5" name="Image 0" descr="Users"/>
           <p:cNvPicPr>
             <a:picLocks noChangeAspect="1"/>
           </p:cNvPicPr>
           <p:nvPr/>
         </p:nvPicPr>
         <p:blipFill>
-          <a:blip r:embed="rId1"/>
-          <a:srcRect l="0" r="0" t="0" b="0"/>
+          <a:blip r:embed="rId3"/>
+          <a:srcRect/>
           <a:stretch/>
         </p:blipFill>
         <p:spPr>
@@ -5354,7 +5359,7 @@
           </a:bodyPr>
           <a:lstStyle/>
           <a:p>
-            <a:pPr algn="l" indent="0" marL="0">
+            <a:pPr marL="0" indent="0" algn="l">
               <a:lnSpc>
                 <a:spcPts val="1960"/>
               </a:lnSpc>
@@ -5396,18 +5401,25 @@
           </a:solidFill>
           <a:ln/>
         </p:spPr>
+        <p:txBody>
+          <a:bodyPr/>
+          <a:lstStyle/>
+          <a:p>
+            <a:endParaRPr lang="en-DE"/>
+          </a:p>
+        </p:txBody>
       </p:sp>
       <p:pic>
         <p:nvPicPr>
-          <p:cNvPr id="8" name="Image 1" descr="Key">    </p:cNvPr>
+          <p:cNvPr id="8" name="Image 1" descr="Key"/>
           <p:cNvPicPr>
             <a:picLocks noChangeAspect="1"/>
           </p:cNvPicPr>
           <p:nvPr/>
         </p:nvPicPr>
         <p:blipFill>
-          <a:blip r:embed="rId2"/>
-          <a:srcRect l="0" r="0" t="0" b="0"/>
+          <a:blip r:embed="rId4"/>
+          <a:srcRect/>
           <a:stretch/>
         </p:blipFill>
         <p:spPr>
@@ -5443,7 +5455,7 @@
           </a:bodyPr>
           <a:lstStyle/>
           <a:p>
-            <a:pPr algn="l" indent="0" marL="0">
+            <a:pPr marL="0" indent="0" algn="l">
               <a:lnSpc>
                 <a:spcPts val="1960"/>
               </a:lnSpc>
@@ -5485,18 +5497,25 @@
           </a:solidFill>
           <a:ln/>
         </p:spPr>
+        <p:txBody>
+          <a:bodyPr/>
+          <a:lstStyle/>
+          <a:p>
+            <a:endParaRPr lang="en-DE"/>
+          </a:p>
+        </p:txBody>
       </p:sp>
       <p:pic>
         <p:nvPicPr>
-          <p:cNvPr id="11" name="Image 2" descr="Link">    </p:cNvPr>
+          <p:cNvPr id="11" name="Image 2" descr="Link"/>
           <p:cNvPicPr>
             <a:picLocks noChangeAspect="1"/>
           </p:cNvPicPr>
           <p:nvPr/>
         </p:nvPicPr>
         <p:blipFill>
-          <a:blip r:embed="rId3"/>
-          <a:srcRect l="0" r="0" t="0" b="0"/>
+          <a:blip r:embed="rId5"/>
+          <a:srcRect/>
           <a:stretch/>
         </p:blipFill>
         <p:spPr>
@@ -5532,7 +5551,7 @@
           </a:bodyPr>
           <a:lstStyle/>
           <a:p>
-            <a:pPr algn="l" indent="0" marL="0">
+            <a:pPr marL="0" indent="0" algn="l">
               <a:lnSpc>
                 <a:spcPts val="1960"/>
               </a:lnSpc>
@@ -5574,18 +5593,25 @@
           </a:solidFill>
           <a:ln/>
         </p:spPr>
+        <p:txBody>
+          <a:bodyPr/>
+          <a:lstStyle/>
+          <a:p>
+            <a:endParaRPr lang="en-DE"/>
+          </a:p>
+        </p:txBody>
       </p:sp>
       <p:pic>
         <p:nvPicPr>
-          <p:cNvPr id="14" name="Image 3" descr="Code">    </p:cNvPr>
+          <p:cNvPr id="14" name="Image 3" descr="Code"/>
           <p:cNvPicPr>
             <a:picLocks noChangeAspect="1"/>
           </p:cNvPicPr>
           <p:nvPr/>
         </p:nvPicPr>
         <p:blipFill>
-          <a:blip r:embed="rId4"/>
-          <a:srcRect l="0" r="0" t="0" b="0"/>
+          <a:blip r:embed="rId6"/>
+          <a:srcRect/>
           <a:stretch/>
         </p:blipFill>
         <p:spPr>
@@ -5621,7 +5647,7 @@
           </a:bodyPr>
           <a:lstStyle/>
           <a:p>
-            <a:pPr algn="l" indent="0" marL="0">
+            <a:pPr marL="0" indent="0" algn="l">
               <a:lnSpc>
                 <a:spcPts val="1960"/>
               </a:lnSpc>
@@ -5663,18 +5689,25 @@
           </a:solidFill>
           <a:ln/>
         </p:spPr>
+        <p:txBody>
+          <a:bodyPr/>
+          <a:lstStyle/>
+          <a:p>
+            <a:endParaRPr lang="en-DE"/>
+          </a:p>
+        </p:txBody>
       </p:sp>
       <p:pic>
         <p:nvPicPr>
-          <p:cNvPr id="17" name="Image 4" descr="Chat">    </p:cNvPr>
+          <p:cNvPr id="17" name="Image 4" descr="Chat"/>
           <p:cNvPicPr>
             <a:picLocks noChangeAspect="1"/>
           </p:cNvPicPr>
           <p:nvPr/>
         </p:nvPicPr>
         <p:blipFill>
-          <a:blip r:embed="rId5"/>
-          <a:srcRect l="0" r="0" t="0" b="0"/>
+          <a:blip r:embed="rId7"/>
+          <a:srcRect/>
           <a:stretch/>
         </p:blipFill>
         <p:spPr>
@@ -5710,7 +5743,7 @@
           </a:bodyPr>
           <a:lstStyle/>
           <a:p>
-            <a:pPr algn="l" indent="0" marL="0">
+            <a:pPr marL="0" indent="0" algn="l">
               <a:lnSpc>
                 <a:spcPts val="1960"/>
               </a:lnSpc>
@@ -5752,18 +5785,25 @@
           </a:solidFill>
           <a:ln/>
         </p:spPr>
+        <p:txBody>
+          <a:bodyPr/>
+          <a:lstStyle/>
+          <a:p>
+            <a:endParaRPr lang="en-DE"/>
+          </a:p>
+        </p:txBody>
       </p:sp>
       <p:pic>
         <p:nvPicPr>
-          <p:cNvPr id="20" name="Image 5" descr="Lightbulb">    </p:cNvPr>
+          <p:cNvPr id="20" name="Image 5" descr="Lightbulb"/>
           <p:cNvPicPr>
             <a:picLocks noChangeAspect="1"/>
           </p:cNvPicPr>
           <p:nvPr/>
         </p:nvPicPr>
         <p:blipFill>
-          <a:blip r:embed="rId6"/>
-          <a:srcRect l="0" r="0" t="0" b="0"/>
+          <a:blip r:embed="rId8"/>
+          <a:srcRect/>
           <a:stretch/>
         </p:blipFill>
         <p:spPr>
@@ -5799,7 +5839,7 @@
           </a:bodyPr>
           <a:lstStyle/>
           <a:p>
-            <a:pPr algn="l" indent="0" marL="0">
+            <a:pPr marL="0" indent="0" algn="l">
               <a:lnSpc>
                 <a:spcPts val="1960"/>
               </a:lnSpc>
@@ -5836,6 +5876,7 @@
         <a:solidFill>
           <a:srgbClr val="F5F4EF"/>
         </a:solidFill>
+        <a:effectLst/>
       </p:bgPr>
     </p:bg>
     <p:spTree>
@@ -5875,14 +5916,14 @@
           </a:bodyPr>
           <a:lstStyle/>
           <a:p>
-            <a:pPr algn="l" indent="0" marL="0">
+            <a:pPr marL="0" indent="0" algn="l">
               <a:lnSpc>
                 <a:spcPts val="1680"/>
               </a:lnSpc>
               <a:buNone/>
             </a:pPr>
             <a:r>
-              <a:rPr lang="en-US" sz="1200" b="1" spc="200" kern="0" dirty="0">
+              <a:rPr lang="en-US" sz="1200" b="1" kern="0" spc="200" dirty="0">
                 <a:solidFill>
                   <a:srgbClr val="1D7368"/>
                 </a:solidFill>
@@ -5899,7 +5940,9 @@
       <p:sp>
         <p:nvSpPr>
           <p:cNvPr id="3" name="Text 1"/>
-          <p:cNvSpPr/>
+          <p:cNvSpPr>
+            <a:spLocks noGrp="1"/>
+          </p:cNvSpPr>
           <p:nvPr>
             <p:ph type="title"/>
           </p:nvPr>
@@ -5921,7 +5964,7 @@
           </a:bodyPr>
           <a:lstStyle/>
           <a:p>
-            <a:pPr algn="l" indent="0" marL="0">
+            <a:pPr marL="0" indent="0" algn="l">
               <a:lnSpc>
                 <a:spcPts val="3960"/>
               </a:lnSpc>
@@ -5968,18 +6011,25 @@
             <a:prstDash val="solid"/>
           </a:ln>
         </p:spPr>
+        <p:txBody>
+          <a:bodyPr/>
+          <a:lstStyle/>
+          <a:p>
+            <a:endParaRPr lang="en-DE"/>
+          </a:p>
+        </p:txBody>
       </p:sp>
       <p:pic>
         <p:nvPicPr>
-          <p:cNvPr id="5" name="Image 0" descr="Users">    </p:cNvPr>
+          <p:cNvPr id="5" name="Image 0" descr="Users"/>
           <p:cNvPicPr>
             <a:picLocks noChangeAspect="1"/>
           </p:cNvPicPr>
           <p:nvPr/>
         </p:nvPicPr>
         <p:blipFill>
-          <a:blip r:embed="rId1"/>
-          <a:srcRect l="0" r="0" t="0" b="0"/>
+          <a:blip r:embed="rId3"/>
+          <a:srcRect/>
           <a:stretch/>
         </p:blipFill>
         <p:spPr>
@@ -6015,7 +6065,7 @@
           </a:bodyPr>
           <a:lstStyle/>
           <a:p>
-            <a:pPr algn="l" indent="0" marL="0">
+            <a:pPr marL="0" indent="0" algn="l">
               <a:lnSpc>
                 <a:spcPts val="2160"/>
               </a:lnSpc>
@@ -6059,7 +6109,7 @@
           </a:bodyPr>
           <a:lstStyle/>
           <a:p>
-            <a:pPr algn="l" marL="168656" indent="-168656">
+            <a:pPr marL="168656" indent="-168656" algn="l">
               <a:lnSpc>
                 <a:spcPts val="1820"/>
               </a:lnSpc>
@@ -6080,7 +6130,7 @@
             <a:endParaRPr lang="en-US" sz="1300" dirty="0"/>
           </a:p>
           <a:p>
-            <a:pPr algn="l" marL="168656" indent="-168656">
+            <a:pPr marL="168656" indent="-168656" algn="l">
               <a:lnSpc>
                 <a:spcPts val="1820"/>
               </a:lnSpc>
@@ -6101,7 +6151,7 @@
             <a:endParaRPr lang="en-US" sz="1300" dirty="0"/>
           </a:p>
           <a:p>
-            <a:pPr algn="l" marL="168656" indent="-168656">
+            <a:pPr marL="168656" indent="-168656" algn="l">
               <a:lnSpc>
                 <a:spcPts val="1820"/>
               </a:lnSpc>
@@ -6149,18 +6199,25 @@
             <a:prstDash val="solid"/>
           </a:ln>
         </p:spPr>
+        <p:txBody>
+          <a:bodyPr/>
+          <a:lstStyle/>
+          <a:p>
+            <a:endParaRPr lang="en-DE"/>
+          </a:p>
+        </p:txBody>
       </p:sp>
       <p:pic>
         <p:nvPicPr>
-          <p:cNvPr id="9" name="Image 1" descr="Verified">    </p:cNvPr>
+          <p:cNvPr id="9" name="Image 1" descr="Verified"/>
           <p:cNvPicPr>
             <a:picLocks noChangeAspect="1"/>
           </p:cNvPicPr>
           <p:nvPr/>
         </p:nvPicPr>
         <p:blipFill>
-          <a:blip r:embed="rId2"/>
-          <a:srcRect l="0" r="0" t="0" b="0"/>
+          <a:blip r:embed="rId4"/>
+          <a:srcRect/>
           <a:stretch/>
         </p:blipFill>
         <p:spPr>
@@ -6196,7 +6253,7 @@
           </a:bodyPr>
           <a:lstStyle/>
           <a:p>
-            <a:pPr algn="l" indent="0" marL="0">
+            <a:pPr marL="0" indent="0" algn="l">
               <a:lnSpc>
                 <a:spcPts val="2160"/>
               </a:lnSpc>
@@ -6240,7 +6297,7 @@
           </a:bodyPr>
           <a:lstStyle/>
           <a:p>
-            <a:pPr algn="l" marL="168656" indent="-168656">
+            <a:pPr marL="168656" indent="-168656" algn="l">
               <a:lnSpc>
                 <a:spcPts val="1820"/>
               </a:lnSpc>
@@ -6261,7 +6318,7 @@
             <a:endParaRPr lang="en-US" sz="1300" dirty="0"/>
           </a:p>
           <a:p>
-            <a:pPr algn="l" marL="168656" indent="-168656">
+            <a:pPr marL="168656" indent="-168656" algn="l">
               <a:lnSpc>
                 <a:spcPts val="1820"/>
               </a:lnSpc>
@@ -6282,7 +6339,7 @@
             <a:endParaRPr lang="en-US" sz="1300" dirty="0"/>
           </a:p>
           <a:p>
-            <a:pPr algn="l" marL="168656" indent="-168656">
+            <a:pPr marL="168656" indent="-168656" algn="l">
               <a:lnSpc>
                 <a:spcPts val="1820"/>
               </a:lnSpc>
@@ -6303,7 +6360,7 @@
             <a:endParaRPr lang="en-US" sz="1300" dirty="0"/>
           </a:p>
           <a:p>
-            <a:pPr algn="l" marL="168656" indent="-168656">
+            <a:pPr marL="168656" indent="-168656" algn="l">
               <a:lnSpc>
                 <a:spcPts val="1820"/>
               </a:lnSpc>
@@ -6351,18 +6408,25 @@
             <a:prstDash val="solid"/>
           </a:ln>
         </p:spPr>
+        <p:txBody>
+          <a:bodyPr/>
+          <a:lstStyle/>
+          <a:p>
+            <a:endParaRPr lang="en-DE"/>
+          </a:p>
+        </p:txBody>
       </p:sp>
       <p:pic>
         <p:nvPicPr>
-          <p:cNvPr id="13" name="Image 2" descr="Activity">    </p:cNvPr>
+          <p:cNvPr id="13" name="Image 2" descr="Activity"/>
           <p:cNvPicPr>
             <a:picLocks noChangeAspect="1"/>
           </p:cNvPicPr>
           <p:nvPr/>
         </p:nvPicPr>
         <p:blipFill>
-          <a:blip r:embed="rId3"/>
-          <a:srcRect l="0" r="0" t="0" b="0"/>
+          <a:blip r:embed="rId5"/>
+          <a:srcRect/>
           <a:stretch/>
         </p:blipFill>
         <p:spPr>
@@ -6398,7 +6462,7 @@
           </a:bodyPr>
           <a:lstStyle/>
           <a:p>
-            <a:pPr algn="l" indent="0" marL="0">
+            <a:pPr marL="0" indent="0" algn="l">
               <a:lnSpc>
                 <a:spcPts val="2160"/>
               </a:lnSpc>
@@ -6442,7 +6506,7 @@
           </a:bodyPr>
           <a:lstStyle/>
           <a:p>
-            <a:pPr algn="l" marL="168656" indent="-168656">
+            <a:pPr marL="168656" indent="-168656" algn="l">
               <a:lnSpc>
                 <a:spcPts val="1820"/>
               </a:lnSpc>
@@ -6463,7 +6527,7 @@
             <a:endParaRPr lang="en-US" sz="1300" dirty="0"/>
           </a:p>
           <a:p>
-            <a:pPr algn="l" marL="168656" indent="-168656">
+            <a:pPr marL="168656" indent="-168656" algn="l">
               <a:lnSpc>
                 <a:spcPts val="1820"/>
               </a:lnSpc>
@@ -6484,7 +6548,7 @@
             <a:endParaRPr lang="en-US" sz="1300" dirty="0"/>
           </a:p>
           <a:p>
-            <a:pPr algn="l" marL="168656" indent="-168656">
+            <a:pPr marL="168656" indent="-168656" algn="l">
               <a:lnSpc>
                 <a:spcPts val="1820"/>
               </a:lnSpc>
@@ -6522,6 +6586,7 @@
         <a:solidFill>
           <a:srgbClr val="12202B"/>
         </a:solidFill>
+        <a:effectLst/>
       </p:bgPr>
     </p:bg>
     <p:spTree>
@@ -6541,7 +6606,9 @@
       <p:sp>
         <p:nvSpPr>
           <p:cNvPr id="2" name="Text 0"/>
-          <p:cNvSpPr/>
+          <p:cNvSpPr>
+            <a:spLocks noGrp="1"/>
+          </p:cNvSpPr>
           <p:nvPr>
             <p:ph type="title"/>
           </p:nvPr>
@@ -6563,7 +6630,7 @@
           </a:bodyPr>
           <a:lstStyle/>
           <a:p>
-            <a:pPr algn="l" indent="0" marL="0">
+            <a:pPr marL="0" indent="0" algn="l">
               <a:lnSpc>
                 <a:spcPts val="6300"/>
               </a:lnSpc>
@@ -6607,7 +6674,7 @@
           </a:bodyPr>
           <a:lstStyle/>
           <a:p>
-            <a:pPr algn="l" indent="0" marL="0">
+            <a:pPr marL="0" indent="0" algn="l">
               <a:lnSpc>
                 <a:spcPts val="2700"/>
               </a:lnSpc>
@@ -6651,7 +6718,7 @@
           </a:bodyPr>
           <a:lstStyle/>
           <a:p>
-            <a:pPr algn="l" indent="0" marL="0">
+            <a:pPr marL="0" indent="0" algn="l">
               <a:lnSpc>
                 <a:spcPts val="1960"/>
               </a:lnSpc>
@@ -6674,15 +6741,15 @@
       </p:sp>
       <p:pic>
         <p:nvPicPr>
-          <p:cNvPr id="5" name="Image 0" descr="Lock">    </p:cNvPr>
+          <p:cNvPr id="5" name="Image 0" descr="Lock"/>
           <p:cNvPicPr>
             <a:picLocks noChangeAspect="1"/>
           </p:cNvPicPr>
           <p:nvPr/>
         </p:nvPicPr>
         <p:blipFill>
-          <a:blip r:embed="rId1"/>
-          <a:srcRect l="0" r="0" t="0" b="0"/>
+          <a:blip r:embed="rId3"/>
+          <a:srcRect/>
           <a:stretch/>
         </p:blipFill>
         <p:spPr>
@@ -6991,4 +7058,319 @@
   <a:objectDefaults/>
   <a:extraClrSchemeLst/>
 </a:theme>
+</file>
+
+<file path=ppt/theme/theme2.xml><?xml version="1.0" encoding="utf-8"?>
+<a:theme xmlns:a="http://schemas.openxmlformats.org/drawingml/2006/main" name="Office Theme">
+  <a:themeElements>
+    <a:clrScheme name="Office">
+      <a:dk1>
+        <a:sysClr val="windowText" lastClr="000000"/>
+      </a:dk1>
+      <a:lt1>
+        <a:sysClr val="window" lastClr="FFFFFF"/>
+      </a:lt1>
+      <a:dk2>
+        <a:srgbClr val="0E2841"/>
+      </a:dk2>
+      <a:lt2>
+        <a:srgbClr val="E8E8E8"/>
+      </a:lt2>
+      <a:accent1>
+        <a:srgbClr val="156082"/>
+      </a:accent1>
+      <a:accent2>
+        <a:srgbClr val="E97132"/>
+      </a:accent2>
+      <a:accent3>
+        <a:srgbClr val="196B24"/>
+      </a:accent3>
+      <a:accent4>
+        <a:srgbClr val="0F9ED5"/>
+      </a:accent4>
+      <a:accent5>
+        <a:srgbClr val="A02B93"/>
+      </a:accent5>
+      <a:accent6>
+        <a:srgbClr val="4EA72E"/>
+      </a:accent6>
+      <a:hlink>
+        <a:srgbClr val="467886"/>
+      </a:hlink>
+      <a:folHlink>
+        <a:srgbClr val="96607D"/>
+      </a:folHlink>
+    </a:clrScheme>
+    <a:fontScheme name="Office">
+      <a:majorFont>
+        <a:latin typeface="Aptos Display" panose="02110004020202020204"/>
+        <a:ea typeface=""/>
+        <a:cs typeface=""/>
+        <a:font script="Jpan" typeface="游ゴシック Light"/>
+        <a:font script="Hang" typeface="맑은 고딕"/>
+        <a:font script="Hans" typeface="等线 Light"/>
+        <a:font script="Hant" typeface="新細明體"/>
+        <a:font script="Arab" typeface="Times New Roman"/>
+        <a:font script="Hebr" typeface="Times New Roman"/>
+        <a:font script="Thai" typeface="Angsana New"/>
+        <a:font script="Ethi" typeface="Nyala"/>
+        <a:font script="Beng" typeface="Vrinda"/>
+        <a:font script="Gujr" typeface="Shruti"/>
+        <a:font script="Khmr" typeface="MoolBoran"/>
+        <a:font script="Knda" typeface="Tunga"/>
+        <a:font script="Guru" typeface="Raavi"/>
+        <a:font script="Cans" typeface="Euphemia"/>
+        <a:font script="Cher" typeface="Plantagenet Cherokee"/>
+        <a:font script="Yiii" typeface="Microsoft Yi Baiti"/>
+        <a:font script="Tibt" typeface="Microsoft Himalaya"/>
+        <a:font script="Thaa" typeface="MV Boli"/>
+        <a:font script="Deva" typeface="Mangal"/>
+        <a:font script="Telu" typeface="Gautami"/>
+        <a:font script="Taml" typeface="Latha"/>
+        <a:font script="Syrc" typeface="Estrangelo Edessa"/>
+        <a:font script="Orya" typeface="Kalinga"/>
+        <a:font script="Mlym" typeface="Kartika"/>
+        <a:font script="Laoo" typeface="DokChampa"/>
+        <a:font script="Sinh" typeface="Iskoola Pota"/>
+        <a:font script="Mong" typeface="Mongolian Baiti"/>
+        <a:font script="Viet" typeface="Times New Roman"/>
+        <a:font script="Uigh" typeface="Microsoft Uighur"/>
+        <a:font script="Geor" typeface="Sylfaen"/>
+        <a:font script="Armn" typeface="Arial"/>
+        <a:font script="Bugi" typeface="Leelawadee UI"/>
+        <a:font script="Bopo" typeface="Microsoft JhengHei"/>
+        <a:font script="Java" typeface="Javanese Text"/>
+        <a:font script="Lisu" typeface="Segoe UI"/>
+        <a:font script="Mymr" typeface="Myanmar Text"/>
+        <a:font script="Nkoo" typeface="Ebrima"/>
+        <a:font script="Olck" typeface="Nirmala UI"/>
+        <a:font script="Osma" typeface="Ebrima"/>
+        <a:font script="Phag" typeface="Phagspa"/>
+        <a:font script="Syrn" typeface="Estrangelo Edessa"/>
+        <a:font script="Syrj" typeface="Estrangelo Edessa"/>
+        <a:font script="Syre" typeface="Estrangelo Edessa"/>
+        <a:font script="Sora" typeface="Nirmala UI"/>
+        <a:font script="Tale" typeface="Microsoft Tai Le"/>
+        <a:font script="Talu" typeface="Microsoft New Tai Lue"/>
+        <a:font script="Tfng" typeface="Ebrima"/>
+      </a:majorFont>
+      <a:minorFont>
+        <a:latin typeface="Aptos" panose="02110004020202020204"/>
+        <a:ea typeface=""/>
+        <a:cs typeface=""/>
+        <a:font script="Jpan" typeface="游ゴシック"/>
+        <a:font script="Hang" typeface="맑은 고딕"/>
+        <a:font script="Hans" typeface="等线"/>
+        <a:font script="Hant" typeface="新細明體"/>
+        <a:font script="Arab" typeface="Arial"/>
+        <a:font script="Hebr" typeface="Arial"/>
+        <a:font script="Thai" typeface="Cordia New"/>
+        <a:font script="Ethi" typeface="Nyala"/>
+        <a:font script="Beng" typeface="Vrinda"/>
+        <a:font script="Gujr" typeface="Shruti"/>
+        <a:font script="Khmr" typeface="DaunPenh"/>
+        <a:font script="Knda" typeface="Tunga"/>
+        <a:font script="Guru" typeface="Raavi"/>
+        <a:font script="Cans" typeface="Euphemia"/>
+        <a:font script="Cher" typeface="Plantagenet Cherokee"/>
+        <a:font script="Yiii" typeface="Microsoft Yi Baiti"/>
+        <a:font script="Tibt" typeface="Microsoft Himalaya"/>
+        <a:font script="Thaa" typeface="MV Boli"/>
+        <a:font script="Deva" typeface="Mangal"/>
+        <a:font script="Telu" typeface="Gautami"/>
+        <a:font script="Taml" typeface="Latha"/>
+        <a:font script="Syrc" typeface="Estrangelo Edessa"/>
+        <a:font script="Orya" typeface="Kalinga"/>
+        <a:font script="Mlym" typeface="Kartika"/>
+        <a:font script="Laoo" typeface="DokChampa"/>
+        <a:font script="Sinh" typeface="Iskoola Pota"/>
+        <a:font script="Mong" typeface="Mongolian Baiti"/>
+        <a:font script="Viet" typeface="Arial"/>
+        <a:font script="Uigh" typeface="Microsoft Uighur"/>
+        <a:font script="Geor" typeface="Sylfaen"/>
+        <a:font script="Armn" typeface="Arial"/>
+        <a:font script="Bugi" typeface="Leelawadee UI"/>
+        <a:font script="Bopo" typeface="Microsoft JhengHei"/>
+        <a:font script="Java" typeface="Javanese Text"/>
+        <a:font script="Lisu" typeface="Segoe UI"/>
+        <a:font script="Mymr" typeface="Myanmar Text"/>
+        <a:font script="Nkoo" typeface="Ebrima"/>
+        <a:font script="Olck" typeface="Nirmala UI"/>
+        <a:font script="Osma" typeface="Ebrima"/>
+        <a:font script="Phag" typeface="Phagspa"/>
+        <a:font script="Syrn" typeface="Estrangelo Edessa"/>
+        <a:font script="Syrj" typeface="Estrangelo Edessa"/>
+        <a:font script="Syre" typeface="Estrangelo Edessa"/>
+        <a:font script="Sora" typeface="Nirmala UI"/>
+        <a:font script="Tale" typeface="Microsoft Tai Le"/>
+        <a:font script="Talu" typeface="Microsoft New Tai Lue"/>
+        <a:font script="Tfng" typeface="Ebrima"/>
+      </a:minorFont>
+    </a:fontScheme>
+    <a:fmtScheme name="Office">
+      <a:fillStyleLst>
+        <a:solidFill>
+          <a:schemeClr val="phClr"/>
+        </a:solidFill>
+        <a:gradFill rotWithShape="1">
+          <a:gsLst>
+            <a:gs pos="0">
+              <a:schemeClr val="phClr">
+                <a:lumMod val="110000"/>
+                <a:satMod val="105000"/>
+                <a:tint val="67000"/>
+              </a:schemeClr>
+            </a:gs>
+            <a:gs pos="50000">
+              <a:schemeClr val="phClr">
+                <a:lumMod val="105000"/>
+                <a:satMod val="103000"/>
+                <a:tint val="73000"/>
+              </a:schemeClr>
+            </a:gs>
+            <a:gs pos="100000">
+              <a:schemeClr val="phClr">
+                <a:lumMod val="105000"/>
+                <a:satMod val="109000"/>
+                <a:tint val="81000"/>
+              </a:schemeClr>
+            </a:gs>
+          </a:gsLst>
+          <a:lin ang="5400000" scaled="0"/>
+        </a:gradFill>
+        <a:gradFill rotWithShape="1">
+          <a:gsLst>
+            <a:gs pos="0">
+              <a:schemeClr val="phClr">
+                <a:satMod val="103000"/>
+                <a:lumMod val="102000"/>
+                <a:tint val="94000"/>
+              </a:schemeClr>
+            </a:gs>
+            <a:gs pos="50000">
+              <a:schemeClr val="phClr">
+                <a:satMod val="110000"/>
+                <a:lumMod val="100000"/>
+                <a:shade val="100000"/>
+              </a:schemeClr>
+            </a:gs>
+            <a:gs pos="100000">
+              <a:schemeClr val="phClr">
+                <a:lumMod val="99000"/>
+                <a:satMod val="120000"/>
+                <a:shade val="78000"/>
+              </a:schemeClr>
+            </a:gs>
+          </a:gsLst>
+          <a:lin ang="5400000" scaled="0"/>
+        </a:gradFill>
+      </a:fillStyleLst>
+      <a:lnStyleLst>
+        <a:ln w="12700" cap="flat" cmpd="sng" algn="ctr">
+          <a:solidFill>
+            <a:schemeClr val="phClr"/>
+          </a:solidFill>
+          <a:prstDash val="solid"/>
+          <a:miter lim="800000"/>
+        </a:ln>
+        <a:ln w="19050" cap="flat" cmpd="sng" algn="ctr">
+          <a:solidFill>
+            <a:schemeClr val="phClr"/>
+          </a:solidFill>
+          <a:prstDash val="solid"/>
+          <a:miter lim="800000"/>
+        </a:ln>
+        <a:ln w="25400" cap="flat" cmpd="sng" algn="ctr">
+          <a:solidFill>
+            <a:schemeClr val="phClr"/>
+          </a:solidFill>
+          <a:prstDash val="solid"/>
+          <a:miter lim="800000"/>
+        </a:ln>
+      </a:lnStyleLst>
+      <a:effectStyleLst>
+        <a:effectStyle>
+          <a:effectLst/>
+        </a:effectStyle>
+        <a:effectStyle>
+          <a:effectLst/>
+        </a:effectStyle>
+        <a:effectStyle>
+          <a:effectLst>
+            <a:outerShdw blurRad="57150" dist="19050" dir="5400000" algn="ctr" rotWithShape="0">
+              <a:srgbClr val="000000">
+                <a:alpha val="63000"/>
+              </a:srgbClr>
+            </a:outerShdw>
+          </a:effectLst>
+        </a:effectStyle>
+      </a:effectStyleLst>
+      <a:bgFillStyleLst>
+        <a:solidFill>
+          <a:schemeClr val="phClr"/>
+        </a:solidFill>
+        <a:solidFill>
+          <a:schemeClr val="phClr">
+            <a:tint val="95000"/>
+            <a:satMod val="170000"/>
+          </a:schemeClr>
+        </a:solidFill>
+        <a:gradFill rotWithShape="1">
+          <a:gsLst>
+            <a:gs pos="0">
+              <a:schemeClr val="phClr">
+                <a:tint val="93000"/>
+                <a:satMod val="150000"/>
+                <a:shade val="98000"/>
+                <a:lumMod val="102000"/>
+              </a:schemeClr>
+            </a:gs>
+            <a:gs pos="50000">
+              <a:schemeClr val="phClr">
+                <a:tint val="98000"/>
+                <a:satMod val="130000"/>
+                <a:shade val="90000"/>
+                <a:lumMod val="103000"/>
+              </a:schemeClr>
+            </a:gs>
+            <a:gs pos="100000">
+              <a:schemeClr val="phClr">
+                <a:shade val="63000"/>
+                <a:satMod val="120000"/>
+              </a:schemeClr>
+            </a:gs>
+          </a:gsLst>
+          <a:lin ang="5400000" scaled="0"/>
+        </a:gradFill>
+      </a:bgFillStyleLst>
+    </a:fmtScheme>
+  </a:themeElements>
+  <a:objectDefaults>
+    <a:lnDef>
+      <a:spPr/>
+      <a:bodyPr/>
+      <a:lstStyle/>
+      <a:style>
+        <a:lnRef idx="2">
+          <a:schemeClr val="accent1"/>
+        </a:lnRef>
+        <a:fillRef idx="0">
+          <a:schemeClr val="accent1"/>
+        </a:fillRef>
+        <a:effectRef idx="1">
+          <a:schemeClr val="accent1"/>
+        </a:effectRef>
+        <a:fontRef idx="minor">
+          <a:schemeClr val="tx1"/>
+        </a:fontRef>
+      </a:style>
+    </a:lnDef>
+  </a:objectDefaults>
+  <a:extraClrSchemeLst/>
+  <a:extLst>
+    <a:ext uri="{05A4C25C-085E-4340-85A3-A5531E510DB2}">
+      <thm15:themeFamily xmlns:thm15="http://schemas.microsoft.com/office/thememl/2012/main" name="Office Theme" id="{2E142A2C-CD16-42D6-873A-C26D2A0506FA}" vid="{1BDDFF52-6CD6-40A5-AB3C-68EB2F1E4D0A}"/>
+    </a:ext>
+  </a:extLst>
+</a:theme>
 </file>